--- a/smoke_samples/53_slide_properties.pptx
+++ b/smoke_samples/53_slide_properties.pptx
@@ -355,9 +355,9 @@
 </file>
 
 <file path=ppt/theme/theme1.xml><?xml version="1.0" encoding="utf-8"?>
-<a:theme xmlns:a="http://schemas.openxmlformats.org/drawingml/2006/main" name="Office Theme">
+<a:theme xmlns:a="http://schemas.openxmlformats.org/drawingml/2006/main" name="Office Theme marketing">
   <a:themeElements>
-    <a:clrScheme name="Office">
+    <a:clrScheme name="Office colors">
       <a:dk1>
         <a:sysClr val="windowText" lastClr="000000"/>
       </a:dk1>
@@ -395,7 +395,7 @@
         <a:srgbClr val="800080"/>
       </a:folHlink>
     </a:clrScheme>
-    <a:fontScheme name="Office">
+    <a:fontScheme name="Office fonts">
       <a:majorFont>
         <a:latin typeface="Calibri"/>
         <a:ea typeface=""/>
